--- a/Airline_Ticket_Price_Prediction_Presentation (1).pptx
+++ b/Airline_Ticket_Price_Prediction_Presentation (1).pptx
@@ -313,7 +313,7 @@
           <a:p>
             <a:fld id="{5BCAD085-E8A6-8845-BD4E-CB4CCA059FC4}" type="datetimeFigureOut">
               <a:rPr lang="en-US" smtClean="0"/>
-              <a:t>7/19/2026</a:t>
+              <a:t>7/25/2026</a:t>
             </a:fld>
             <a:endParaRPr lang="en-US"/>
           </a:p>
@@ -483,7 +483,7 @@
           <a:p>
             <a:fld id="{5BCAD085-E8A6-8845-BD4E-CB4CCA059FC4}" type="datetimeFigureOut">
               <a:rPr lang="en-US" smtClean="0"/>
-              <a:t>7/19/2026</a:t>
+              <a:t>7/25/2026</a:t>
             </a:fld>
             <a:endParaRPr lang="en-US"/>
           </a:p>
@@ -663,7 +663,7 @@
           <a:p>
             <a:fld id="{5BCAD085-E8A6-8845-BD4E-CB4CCA059FC4}" type="datetimeFigureOut">
               <a:rPr lang="en-US" smtClean="0"/>
-              <a:t>7/19/2026</a:t>
+              <a:t>7/25/2026</a:t>
             </a:fld>
             <a:endParaRPr lang="en-US"/>
           </a:p>
@@ -833,7 +833,7 @@
           <a:p>
             <a:fld id="{5BCAD085-E8A6-8845-BD4E-CB4CCA059FC4}" type="datetimeFigureOut">
               <a:rPr lang="en-US" smtClean="0"/>
-              <a:t>7/19/2026</a:t>
+              <a:t>7/25/2026</a:t>
             </a:fld>
             <a:endParaRPr lang="en-US"/>
           </a:p>
@@ -1079,7 +1079,7 @@
           <a:p>
             <a:fld id="{5BCAD085-E8A6-8845-BD4E-CB4CCA059FC4}" type="datetimeFigureOut">
               <a:rPr lang="en-US" smtClean="0"/>
-              <a:t>7/19/2026</a:t>
+              <a:t>7/25/2026</a:t>
             </a:fld>
             <a:endParaRPr lang="en-US"/>
           </a:p>
@@ -1367,7 +1367,7 @@
           <a:p>
             <a:fld id="{5BCAD085-E8A6-8845-BD4E-CB4CCA059FC4}" type="datetimeFigureOut">
               <a:rPr lang="en-US" smtClean="0"/>
-              <a:t>7/19/2026</a:t>
+              <a:t>7/25/2026</a:t>
             </a:fld>
             <a:endParaRPr lang="en-US"/>
           </a:p>
@@ -1789,7 +1789,7 @@
           <a:p>
             <a:fld id="{5BCAD085-E8A6-8845-BD4E-CB4CCA059FC4}" type="datetimeFigureOut">
               <a:rPr lang="en-US" smtClean="0"/>
-              <a:t>7/19/2026</a:t>
+              <a:t>7/25/2026</a:t>
             </a:fld>
             <a:endParaRPr lang="en-US"/>
           </a:p>
@@ -1907,7 +1907,7 @@
           <a:p>
             <a:fld id="{5BCAD085-E8A6-8845-BD4E-CB4CCA059FC4}" type="datetimeFigureOut">
               <a:rPr lang="en-US" smtClean="0"/>
-              <a:t>7/19/2026</a:t>
+              <a:t>7/25/2026</a:t>
             </a:fld>
             <a:endParaRPr lang="en-US"/>
           </a:p>
@@ -2002,7 +2002,7 @@
           <a:p>
             <a:fld id="{5BCAD085-E8A6-8845-BD4E-CB4CCA059FC4}" type="datetimeFigureOut">
               <a:rPr lang="en-US" smtClean="0"/>
-              <a:t>7/19/2026</a:t>
+              <a:t>7/25/2026</a:t>
             </a:fld>
             <a:endParaRPr lang="en-US"/>
           </a:p>
@@ -2279,7 +2279,7 @@
           <a:p>
             <a:fld id="{5BCAD085-E8A6-8845-BD4E-CB4CCA059FC4}" type="datetimeFigureOut">
               <a:rPr lang="en-US" smtClean="0"/>
-              <a:t>7/19/2026</a:t>
+              <a:t>7/25/2026</a:t>
             </a:fld>
             <a:endParaRPr lang="en-US"/>
           </a:p>
@@ -2532,7 +2532,7 @@
           <a:p>
             <a:fld id="{5BCAD085-E8A6-8845-BD4E-CB4CCA059FC4}" type="datetimeFigureOut">
               <a:rPr lang="en-US" smtClean="0"/>
-              <a:t>7/19/2026</a:t>
+              <a:t>7/25/2026</a:t>
             </a:fld>
             <a:endParaRPr lang="en-US"/>
           </a:p>
@@ -2745,7 +2745,7 @@
           <a:p>
             <a:fld id="{5BCAD085-E8A6-8845-BD4E-CB4CCA059FC4}" type="datetimeFigureOut">
               <a:rPr lang="en-US" smtClean="0"/>
-              <a:t>7/19/2026</a:t>
+              <a:t>7/25/2026</a:t>
             </a:fld>
             <a:endParaRPr lang="en-US"/>
           </a:p>
@@ -3322,12 +3322,12 @@
               <a:defRPr sz="2200"/>
             </a:pPr>
             <a:r>
-              <a:rPr lang="en-US" sz="2200" dirty="0" smtClean="0"/>
-              <a:t> </a:t>
-            </a:r>
-            <a:r>
-              <a:rPr lang="en-US" sz="2200" dirty="0"/>
-              <a:t>Data Preprocessing, EDA, Hypothesis Testing and Feature Engineering were done successfully. </a:t>
+              <a:rPr lang="en-US" sz="2200" smtClean="0"/>
+              <a:t>Data </a:t>
+            </a:r>
+            <a:r>
+              <a:rPr lang="en-US" sz="2200" dirty="0"/>
+              <a:t>Preprocessing, EDA, Hypothesis Testing and Feature Engineering were done successfully. </a:t>
             </a:r>
             <a:endParaRPr lang="en-US" sz="2200" dirty="0" smtClean="0"/>
           </a:p>
@@ -3370,11 +3370,11 @@
             </a:pPr>
             <a:r>
               <a:rPr lang="en-US" sz="2200" dirty="0" smtClean="0"/>
-              <a:t> </a:t>
-            </a:r>
-            <a:r>
-              <a:rPr lang="en-US" sz="2200" dirty="0"/>
-              <a:t>Compared the performance of the models using MAE, RMSE and R² Score. </a:t>
+              <a:t>Compared </a:t>
+            </a:r>
+            <a:r>
+              <a:rPr lang="en-US" sz="2200" dirty="0"/>
+              <a:t>the performance of the models using MAE, RMSE and R² Score. </a:t>
             </a:r>
             <a:endParaRPr lang="en-US" sz="2200" dirty="0" smtClean="0"/>
           </a:p>
@@ -3814,11 +3814,11 @@
             </a:pPr>
             <a:r>
               <a:rPr lang="en-US" sz="2200" dirty="0" smtClean="0"/>
-              <a:t> </a:t>
-            </a:r>
-            <a:r>
-              <a:rPr lang="en-US" sz="2200" dirty="0"/>
-              <a:t>Travel Class </a:t>
+              <a:t>Travel </a:t>
+            </a:r>
+            <a:r>
+              <a:rPr lang="en-US" sz="2200" dirty="0"/>
+              <a:t>Class </a:t>
             </a:r>
             <a:endParaRPr lang="en-US" sz="2200" dirty="0" smtClean="0"/>
           </a:p>
@@ -3837,11 +3837,11 @@
             </a:pPr>
             <a:r>
               <a:rPr lang="en-US" sz="2200" dirty="0" smtClean="0"/>
-              <a:t> </a:t>
-            </a:r>
-            <a:r>
-              <a:rPr lang="en-US" sz="2200" dirty="0"/>
-              <a:t>The number of days remaining before leaving.</a:t>
+              <a:t>The </a:t>
+            </a:r>
+            <a:r>
+              <a:rPr lang="en-US" sz="2200" dirty="0"/>
+              <a:t>number of days remaining before leaving.</a:t>
             </a:r>
             <a:endParaRPr dirty="0"/>
           </a:p>
@@ -4614,20 +4614,21 @@
             </a:r>
             <a:r>
               <a:rPr lang="en-US" sz="2200" dirty="0" smtClean="0"/>
-              <a:t>tickets</a:t>
-            </a:r>
-          </a:p>
-          <a:p>
-            <a:pPr>
-              <a:defRPr sz="2200"/>
-            </a:pPr>
-            <a:r>
-              <a:rPr lang="en-US" sz="2200" dirty="0" smtClean="0"/>
-              <a:t>. </a:t>
-            </a:r>
-            <a:r>
-              <a:rPr lang="en-US" sz="2200" dirty="0"/>
-              <a:t>Dynamic pricing systems. </a:t>
+              <a:t>tickets.</a:t>
+            </a:r>
+            <a:endParaRPr lang="en-US" sz="2200" dirty="0" smtClean="0"/>
+          </a:p>
+          <a:p>
+            <a:pPr>
+              <a:defRPr sz="2200"/>
+            </a:pPr>
+            <a:r>
+              <a:rPr lang="en-US" sz="2200" dirty="0" smtClean="0"/>
+              <a:t>Dynamic </a:t>
+            </a:r>
+            <a:r>
+              <a:rPr lang="en-US" sz="2200" dirty="0"/>
+              <a:t>pricing systems. </a:t>
             </a:r>
             <a:endParaRPr lang="en-US" sz="2200" dirty="0" smtClean="0"/>
           </a:p>
@@ -4781,11 +4782,11 @@
             </a:pPr>
             <a:r>
               <a:rPr lang="en-US" sz="2200" dirty="0" smtClean="0"/>
-              <a:t> </a:t>
-            </a:r>
-            <a:r>
-              <a:rPr lang="en-US" sz="2200" dirty="0"/>
-              <a:t>Model is based on past information</a:t>
+              <a:t>Model </a:t>
+            </a:r>
+            <a:r>
+              <a:rPr lang="en-US" sz="2200" dirty="0"/>
+              <a:t>is based on past information</a:t>
             </a:r>
             <a:r>
               <a:rPr lang="en-US" sz="2200" dirty="0" smtClean="0"/>
@@ -4798,11 +4799,11 @@
             </a:pPr>
             <a:r>
               <a:rPr lang="en-US" sz="2200" dirty="0" smtClean="0"/>
-              <a:t> </a:t>
-            </a:r>
-            <a:r>
-              <a:rPr lang="en-US" sz="2200" dirty="0"/>
-              <a:t>This may result in decreased accuracy with rapid fluctuations in the market</a:t>
+              <a:t>This </a:t>
+            </a:r>
+            <a:r>
+              <a:rPr lang="en-US" sz="2200" dirty="0"/>
+              <a:t>may result in decreased accuracy with rapid fluctuations in the market</a:t>
             </a:r>
             <a:r>
               <a:rPr lang="en-US" sz="2200" dirty="0" smtClean="0"/>
@@ -4853,11 +4854,11 @@
             </a:pPr>
             <a:r>
               <a:rPr lang="en-US" sz="2200" dirty="0" smtClean="0"/>
-              <a:t> </a:t>
-            </a:r>
-            <a:r>
-              <a:rPr lang="en-US" sz="2200" dirty="0"/>
-              <a:t>Utilize larger and up-to-the-minute data sets. </a:t>
+              <a:t>Utilize </a:t>
+            </a:r>
+            <a:r>
+              <a:rPr lang="en-US" sz="2200" dirty="0"/>
+              <a:t>larger and up-to-the-minute data sets. </a:t>
             </a:r>
             <a:endParaRPr lang="en-US" sz="2200" dirty="0" smtClean="0"/>
           </a:p>
@@ -4898,11 +4899,11 @@
             </a:pPr>
             <a:r>
               <a:rPr lang="en-US" sz="2200" dirty="0" smtClean="0"/>
-              <a:t> </a:t>
-            </a:r>
-            <a:r>
-              <a:rPr lang="en-US" sz="2200" dirty="0"/>
-              <a:t>Connect with real time airline booking systems</a:t>
+              <a:t>Connect </a:t>
+            </a:r>
+            <a:r>
+              <a:rPr lang="en-US" sz="2200" dirty="0"/>
+              <a:t>with real time airline booking systems</a:t>
             </a:r>
             <a:r>
               <a:rPr lang="en-US" sz="2200" dirty="0" smtClean="0"/>
@@ -4915,11 +4916,11 @@
             </a:pPr>
             <a:r>
               <a:rPr lang="en-US" sz="2200" dirty="0" smtClean="0"/>
-              <a:t> </a:t>
-            </a:r>
-            <a:r>
-              <a:rPr lang="en-US" sz="2200" dirty="0"/>
-              <a:t>Include additional pricing factors such as holidays and weather. </a:t>
+              <a:t>Include </a:t>
+            </a:r>
+            <a:r>
+              <a:rPr lang="en-US" sz="2200" dirty="0"/>
+              <a:t>additional pricing factors such as holidays and weather. </a:t>
             </a:r>
             <a:endParaRPr dirty="0"/>
           </a:p>
